--- a/docs/四条线方向请教PPT_20260610/四条线方向请教_20260610.pptx
+++ b/docs/四条线方向请教PPT_20260610/四条线方向请教_20260610.pptx
@@ -3169,7 +3169,7 @@
         <p:spPr>
           <a:xfrm>
             <a:off x="360000" y="737999"/>
-            <a:ext cx="8280000" cy="468000"/>
+            <a:ext cx="8820000" cy="468000"/>
           </a:xfrm>
           <a:prstGeom prst="rect">
             <a:avLst/>
@@ -3183,7 +3183,7 @@
           <a:lstStyle/>
           <a:p>
             <a:pPr algn="l">
-              <a:defRPr sz="2800" b="1">
+              <a:defRPr sz="2700" b="1">
                 <a:solidFill>
                   <a:srgbClr val="162A45"/>
                 </a:solidFill>
@@ -3191,7 +3191,7 @@
               </a:defRPr>
             </a:pPr>
             <a:r>
-              <a:t>DiffB110：3D 分子扩散模型强化学习的四条探索线</a:t>
+              <a:t>DiffB110：RE-CmeB 靶点适配分子生成的四条探索线</a:t>
             </a:r>
           </a:p>
         </p:txBody>
@@ -3227,7 +3227,7 @@
               </a:defRPr>
             </a:pPr>
             <a:r>
-              <a:t>底座质量、reward hacking 与课题主线选择</a:t>
+              <a:t>生成质量、靶点适配与课题路线选择</a:t>
             </a:r>
           </a:p>
         </p:txBody>
@@ -3731,7 +3731,7 @@
               </a:defRPr>
             </a:pPr>
             <a:r>
-              <a:t>当前最倾向主线</a:t>
+              <a:t>当前最倾向路线</a:t>
             </a:r>
           </a:p>
         </p:txBody>
@@ -3767,7 +3767,7 @@
               </a:defRPr>
             </a:pPr>
             <a:r>
-              <a:t>目标：请老师判断课题应收敛到哪条主线，以及下一步如何设计成更像计算机方法论文。</a:t>
+              <a:t>目标：请老师判断哪条路线最有希望生成更适配 RE-CmeB 靶点、且化学合理的候选分子。</a:t>
             </a:r>
           </a:p>
         </p:txBody>
@@ -3865,7 +3865,7 @@
               </a:defRPr>
             </a:pPr>
             <a:r>
-              <a:t>两种可收敛论文 story</a:t>
+              <a:t>两种可收敛课题路线</a:t>
             </a:r>
           </a:p>
         </p:txBody>
@@ -3901,7 +3901,7 @@
               </a:defRPr>
             </a:pPr>
             <a:r>
-              <a:t>当前个人倾向 Story A，但需要老师判断方法贡献是否足够</a:t>
+              <a:t>当前个人倾向 Story A，但需要老师判断哪条更利于产出可用候选分子</a:t>
             </a:r>
           </a:p>
         </p:txBody>
@@ -4027,7 +4027,7 @@
               </a:defRPr>
             </a:pPr>
             <a:r>
-              <a:t>Story A：DiffGui 上的分布稳定化 RL</a:t>
+              <a:t>路线 A：DiffGui 靶点适配生成优化</a:t>
             </a:r>
           </a:p>
         </p:txBody>
@@ -4082,7 +4082,7 @@
               </a:defRPr>
             </a:pPr>
             <a:r>
-              <a:t>贡献：joint atom-bond-coordinate 底座上的 reward-guided fine-tuning</a:t>
+              <a:t>目标：生成更适配 RE-CmeB、且化学合理的候选分子</a:t>
             </a:r>
           </a:p>
           <a:p>
@@ -4098,7 +4098,7 @@
               </a:defRPr>
             </a:pPr>
             <a:r>
-              <a:t>重点：docking 优化与 ring/carbon 分布稳定化</a:t>
+              <a:t>重点：docking/LE 与 ring/carbon 分布稳定化</a:t>
             </a:r>
           </a:p>
           <a:p>
@@ -4150,7 +4150,7 @@
               </a:defRPr>
             </a:pPr>
             <a:r>
-              <a:t>当前更推荐：底座更稳，问题更聚焦，工程已跑通。</a:t>
+              <a:t>当前更推荐：底座更稳，更可能服务药学筛选目标。</a:t>
             </a:r>
           </a:p>
         </p:txBody>
@@ -4186,7 +4186,7 @@
               </a:defRPr>
             </a:pPr>
             <a:r>
-              <a:t>Story B：DiffSBDD 的 bond-aware 适配</a:t>
+              <a:t>路线 B：DiffSBDD 的 bond-aware 适配</a:t>
             </a:r>
           </a:p>
         </p:txBody>
@@ -4241,7 +4241,7 @@
               </a:defRPr>
             </a:pPr>
             <a:r>
-              <a:t>贡献：参考已有 x/h/e 思路，验证能否修复 DiffSBDD 成键短板</a:t>
+              <a:t>目标：修复 DiffSBDD 成键短板，提高有效分子比例</a:t>
             </a:r>
           </a:p>
           <a:p>
@@ -4273,7 +4273,7 @@
               </a:defRPr>
             </a:pPr>
             <a:r>
-              <a:t>RL 作为应用验证，而不是短期主线</a:t>
+              <a:t>RL 作为 RE-CmeB 靶点适配应用验证</a:t>
             </a:r>
           </a:p>
         </p:txBody>
@@ -4345,7 +4345,7 @@
               </a:defRPr>
             </a:pPr>
             <a:r>
-              <a:t>结论口径：当前是方向选择与方法收敛阶段，不是最终成果展示。</a:t>
+              <a:t>结论口径：当前是路线选择与药学目标对齐阶段，不是最终成果展示。</a:t>
             </a:r>
           </a:p>
         </p:txBody>
@@ -5836,7 +5836,7 @@
               </a:defRPr>
             </a:pPr>
             <a:r>
-              <a:t>适合作为 ablation 或辅助增强，不宜作为主线</a:t>
+              <a:t>适合作为 ablation 或辅助增强，不宜单独承担药学目标</a:t>
             </a:r>
           </a:p>
         </p:txBody>
@@ -5960,7 +5960,7 @@
               </a:defRPr>
             </a:pPr>
             <a:r>
-              <a:t>工程风险低，容易接到现有 RL 主线</a:t>
+              <a:t>工程风险低，容易接到现有 RL 流程</a:t>
             </a:r>
           </a:p>
           <a:p>
@@ -6028,7 +6028,7 @@
               </a:defRPr>
             </a:pPr>
             <a:r>
-              <a:t>定位：低风险修补方案，可作为对照和 ablation；不建议作为论文主线。</a:t>
+              <a:t>定位：低风险修补方案，可作为对照和 ablation；但不一定显著提高候选分子质量。</a:t>
             </a:r>
           </a:p>
         </p:txBody>
@@ -6559,7 +6559,7 @@
               </a:defRPr>
             </a:pPr>
             <a:r>
-              <a:t>当前最倾向主线，但不能说已经成功</a:t>
+              <a:t>当前最倾向路线，但不能说已经成功</a:t>
             </a:r>
           </a:p>
         </p:txBody>
@@ -7502,7 +7502,7 @@
               </a:defRPr>
             </a:pPr>
             <a:r>
-              <a:t>四条线风险-收益判断</a:t>
+              <a:t>四条线质量-可控性判断</a:t>
             </a:r>
           </a:p>
         </p:txBody>
@@ -7702,8 +7702,8 @@
         </p:nvSpPr>
         <p:spPr>
           <a:xfrm>
-            <a:off x="306000" y="2160000"/>
-            <a:ext cx="1080000" cy="251999"/>
+            <a:off x="306000" y="2088000"/>
+            <a:ext cx="1080000" cy="360000"/>
           </a:xfrm>
           <a:prstGeom prst="rect">
             <a:avLst/>
@@ -7725,11 +7725,11 @@
               </a:defRPr>
             </a:pPr>
             <a:r>
-              <a:t>方法贡献</a:t>
+              <a:t>分子质量</a:t>
             </a:r>
             <a:br/>
             <a:r>
-              <a:t>确定性 ↑</a:t>
+              <a:t>改善确定性 ↑</a:t>
             </a:r>
           </a:p>
         </p:txBody>
@@ -8519,7 +8519,7 @@
               </a:defRPr>
             </a:pPr>
             <a:r>
-              <a:t>D 线 DiffGui RL 是否足够作为主线？</a:t>
+              <a:t>哪条线最可能改善 RE-CmeB 候选分子质量？</a:t>
             </a:r>
           </a:p>
         </p:txBody>
@@ -8555,7 +8555,7 @@
               </a:defRPr>
             </a:pPr>
             <a:r>
-              <a:t>底座更好、RL 已接通，但 docking 尚未同步改善。</a:t>
+              <a:t>底座、docking、化学合理性和分布稳定性要一起看。</a:t>
             </a:r>
           </a:p>
         </p:txBody>
@@ -8691,7 +8691,7 @@
               </a:defRPr>
             </a:pPr>
             <a:r>
-              <a:t>reward hacking / distribution-stabilized RL 能否构成方法贡献？</a:t>
+              <a:t>reward hacking 会不会损害药学可用性？</a:t>
             </a:r>
           </a:p>
         </p:txBody>
@@ -8727,7 +8727,7 @@
               </a:defRPr>
             </a:pPr>
             <a:r>
-              <a:t>若贡献在分布稳定化和可控优化，实验应如何设计？</a:t>
+              <a:t>分数好看但高碳、低极性、复杂环偏移，可能并不适合后续筛选。</a:t>
             </a:r>
           </a:p>
         </p:txBody>
@@ -9035,7 +9035,7 @@
               </a:defRPr>
             </a:pPr>
             <a:r>
-              <a:t>审稿人更看重什么？</a:t>
+              <a:t>下一步验证应优先补什么？</a:t>
             </a:r>
           </a:p>
         </p:txBody>
@@ -9071,7 +9071,7 @@
               </a:defRPr>
             </a:pPr>
             <a:r>
-              <a:t>生成质量、docking、分布护栏，还是模型结构新颖性？</a:t>
+              <a:t>docking/LE、化学合理性、scaffold 多样性，还是人工可检查候选分子？</a:t>
             </a:r>
           </a:p>
         </p:txBody>
